--- a/labs/lab05/presentation/output/os-intro-lab05-presentation.pptx
+++ b/labs/lab05/presentation/output/os-intro-lab05-presentation.pptx
@@ -3172,7 +3172,7 @@
             </a:pPr>
             <a:r>
               <a:rPr/>
-              <a:t>Лабораторная работа №2</a:t>
+              <a:t>Лабораторная работа №5</a:t>
             </a:r>
           </a:p>
         </p:txBody>
